--- a/docs/ppt-book/projets/Projet1-Expose-scolaire.pptx
+++ b/docs/ppt-book/projets/Projet1-Expose-scolaire.pptx
@@ -113,19 +113,19 @@
   <p:extLst>
     <p:ext uri="{521415D9-36F7-43E2-AB2F-B90AF26B5E84}">
       <p14:sectionLst xmlns:p14="http://schemas.microsoft.com/office/powerpoint/2010/main">
-        <p14:section name="مقدمة" id="{db7307e9-70b5-6fec-ac63-d5026de6c0a0}">
+        <p14:section name="مقدمة" id="{4dfb340c-6617-8d70-ff79-8575eab4debe}">
           <p14:sldIdLst>
             <p14:sldId id="256"/>
             <p14:sldId id="257"/>
           </p14:sldIdLst>
         </p14:section>
-        <p14:section name="الماء على الأرض" id="{92da5b78-6ed8-d7d7-3f3e-07bf5443897e}">
+        <p14:section name="الماء على الأرض" id="{5e58522a-57c0-c2d6-bd34-49687caf8e11}">
           <p14:sldIdLst>
             <p14:sldId id="258"/>
             <p14:sldId id="259"/>
           </p14:sldIdLst>
         </p14:section>
-        <p14:section name="الحلول" id="{f226dba9-ef7a-36a0-b3f3-7eb8713105de}">
+        <p14:section name="الحلول" id="{3e08f3c7-8864-be69-f096-b3ef09c3da7e}">
           <p14:sldIdLst>
             <p14:sldId id="260"/>
             <p14:sldId id="261"/>
